--- a/川崎市_統合提案資料_v2.pptx
+++ b/川崎市_統合提案資料_v2.pptx
@@ -1305,7 +1305,7 @@
           <a:p>
             <a:r>
               <a:rPr lang="en-US" dirty="0"/>
-              <a:t>廃棄物量データの3つの価値：量（排出量トレンド）・比（施設間比較）・域（地域別動向）。廃棄物収集許可業者として合法的・独占的に取得できるデータ。</a:t>
+              <a:t>廃棄物量データの3つの価値：量（排出量トレンド）・比（施設間比較）・域（地域別動向）。廃棄物収集許可業者として合法的・独自ネットワークで取得できるデータ。</a:t>
             </a:r>
             <a:endParaRPr lang="en-US" dirty="0"/>
           </a:p>
@@ -1393,7 +1393,7 @@
           <a:p>
             <a:r>
               <a:rPr lang="en-US" dirty="0"/>
-              <a:t>3つの優位性：①網羅性と継続性、②追加投資不要の経済性、③現場知と独占的取得権（廃棄物収集許可業者）。</a:t>
+              <a:t>3つの優位性：①網羅性と継続性、②追加投資不要の経済性、③現場知と独自の取得権（廃棄物収集許可業者）。</a:t>
             </a:r>
             <a:endParaRPr lang="en-US" dirty="0"/>
           </a:p>
@@ -2343,7 +2343,7 @@
                 <a:ea typeface="Calibri" pitchFamily="34" charset="-122"/>
                 <a:cs typeface="Calibri" pitchFamily="34" charset="-120"/>
               </a:rPr>
-              <a:t>センサー搭載対象トラック</a:t>
+              <a:t>保有トラック（東京・神奈川全域）</a:t>
             </a:r>
             <a:endParaRPr lang="en-US" sz="950" dirty="0"/>
           </a:p>
@@ -2466,7 +2466,7 @@
                 <a:ea typeface="Calibri" pitchFamily="34" charset="-122"/>
                 <a:cs typeface="Calibri" pitchFamily="34" charset="-120"/>
               </a:rPr>
-              <a:t>廃棄物量データ収集施設</a:t>
+              <a:t>廃棄物収集施設（東京・神奈川全域）</a:t>
             </a:r>
             <a:endParaRPr lang="en-US" sz="950" dirty="0"/>
           </a:p>
@@ -6826,7 +6826,7 @@
                 <a:ea typeface="Calibri" pitchFamily="34" charset="-122"/>
                 <a:cs typeface="Calibri" pitchFamily="34" charset="-120"/>
               </a:rPr>
-              <a:t>保有車両台数</a:t>
+              <a:t>保有車両（東京・神奈川全域）</a:t>
             </a:r>
             <a:endParaRPr lang="en-US" sz="1000" dirty="0"/>
           </a:p>
@@ -6904,7 +6904,7 @@
                 <a:ea typeface="Calibri" pitchFamily="34" charset="-122"/>
                 <a:cs typeface="Calibri" pitchFamily="34" charset="-120"/>
               </a:rPr>
-              <a:t>法人取引実績</a:t>
+              <a:t>法人取引先（東京・神奈川全域）</a:t>
             </a:r>
             <a:endParaRPr lang="en-US" sz="1000" dirty="0"/>
           </a:p>
@@ -7310,7 +7310,7 @@
                 <a:ea typeface="Calibri" pitchFamily="34" charset="-122"/>
                 <a:cs typeface="Calibri" pitchFamily="34" charset="-120"/>
               </a:rPr>
-              <a:t>廃棄物収集許可業者として独占取得</a:t>
+              <a:t>廃棄物収集許可業者ならではの独自取得権</a:t>
             </a:r>
             <a:endParaRPr lang="en-US" sz="1300" dirty="0"/>
           </a:p>
@@ -7352,7 +7352,7 @@
                 <a:ea typeface="Calibri" pitchFamily="34" charset="-122"/>
                 <a:cs typeface="Calibri" pitchFamily="34" charset="-120"/>
               </a:rPr>
-              <a:t>廃棄物収集許可を持つ業者のみが施設内のデータを合法的に記録可能。250社超の施設から廃棄物量データを独占的に取得できます。</a:t>
+              <a:t>廃棄物収集許可を持つ業者のみが施設内のデータを合法的に記録可能。当社ならではの独自ネットワークで継続的に取得できます。</a:t>
             </a:r>
             <a:endParaRPr lang="en-US" sz="1050" dirty="0"/>
           </a:p>
@@ -14161,7 +14161,7 @@
                 <a:ea typeface="Calibri" pitchFamily="34" charset="-122"/>
                 <a:cs typeface="Calibri" pitchFamily="34" charset="-120"/>
               </a:rPr>
-              <a:t>現場知と独占的取得権</a:t>
+              <a:t>現場知と独自の取得権</a:t>
             </a:r>
             <a:endParaRPr lang="en-US" sz="1400" dirty="0"/>
           </a:p>
@@ -14243,7 +14243,7 @@
                 <a:ea typeface="Calibri" pitchFamily="34" charset="-122"/>
                 <a:cs typeface="Calibri" pitchFamily="34" charset="-120"/>
               </a:rPr>
-              <a:t>廃棄物収集許可業者が取得可</a:t>
+              <a:t>廃棄物収集許可業者のみ合法取得可</a:t>
             </a:r>
             <a:endParaRPr lang="en-US" sz="1100" dirty="0"/>
           </a:p>

--- a/川崎市_統合提案資料_v2.pptx
+++ b/川崎市_統合提案資料_v2.pptx
@@ -1041,7 +1041,7 @@
           <a:p>
             <a:r>
               <a:rPr lang="en-US" dirty="0"/>
-              <a:t>3つの課題：①パトロール体制の困難、②事後対応型管理、③環境施策・廃棄物管理のデータ不足。サキュレの2事業で解決を提案。</a:t>
+              <a:t>3つの課題：①市道約2,400kmのカバー率限界（川崎市固有数値）、②道路インフラ長寿命化計画が掲げる予防保全への転換、③環境施策・廃棄物管理のデータ不足。サキュレの2事業で解決を提案。</a:t>
             </a:r>
             <a:endParaRPr lang="en-US" dirty="0"/>
           </a:p>
@@ -9084,7 +9084,7 @@
                 <a:ea typeface="Calibri" pitchFamily="34" charset="-122"/>
                 <a:cs typeface="Calibri" pitchFamily="34" charset="-120"/>
               </a:rPr>
-              <a:t>パトロール・巡回体制の維持が困難</a:t>
+              <a:t>市道約2,400kmを少数体制でパトロール——カバー率の限界</a:t>
             </a:r>
             <a:endParaRPr lang="en-US" sz="1400" dirty="0"/>
           </a:p>
@@ -9126,7 +9126,7 @@
                 <a:ea typeface="Calibri" pitchFamily="34" charset="-122"/>
                 <a:cs typeface="Calibri" pitchFamily="34" charset="-120"/>
               </a:rPr>
-              <a:t>自治体職員の減少と高齢化が進むなか、広大なエリアを高頻度でカバーする人的パトロールの継続は、人員・予算の両面から困難な状況にあります。</a:t>
+              <a:t>川崎市が管理する市道は約2,400kmに及びます。道路パトロール要員の不足が続くなか、全路線を高頻度でカバーすることは困難で、損傷の見落としや対応遅延が常在するリスクとなっています。</a:t>
             </a:r>
             <a:endParaRPr lang="en-US" sz="1150" dirty="0"/>
           </a:p>
@@ -9269,7 +9269,7 @@
                 <a:ea typeface="Calibri" pitchFamily="34" charset="-122"/>
                 <a:cs typeface="Calibri" pitchFamily="34" charset="-120"/>
               </a:rPr>
-              <a:t>市民通報を主とする「事後対応」からの脱却</a:t>
+              <a:t>市民通報頼りの「事後対応」——長寿命化計画が掲げる予防保全の実現が急務</a:t>
             </a:r>
             <a:endParaRPr lang="en-US" sz="1400" dirty="0"/>
           </a:p>
@@ -9311,7 +9311,7 @@
                 <a:ea typeface="Calibri" pitchFamily="34" charset="-122"/>
                 <a:cs typeface="Calibri" pitchFamily="34" charset="-120"/>
               </a:rPr>
-              <a:t>道路陥没・落下物等のインフラ損傷は、市民通報を受けて初めて対応するケースが多く、損傷の早期発見・予防的な管理体制の構築が喫緊の課題です。</a:t>
+              <a:t>損傷の多くが市民通報を起点に発覚するため、発生から対応完了まで時間を要します。川崎市が推進する「道路インフラ長寿命化計画」の目標達成には、予防的なリアルタイム損傷検知の仕組みが不可欠です。</a:t>
             </a:r>
             <a:endParaRPr lang="en-US" sz="1150" dirty="0"/>
           </a:p>

--- a/川崎市_統合提案資料_v2.pptx
+++ b/川崎市_統合提案資料_v2.pptx
@@ -1129,7 +1129,7 @@
           <a:p>
             <a:r>
               <a:rPr lang="en-US" dirty="0"/>
-              <a:t>2事業のデータフロー。左：廃棄物量データ（3ステップ）、右：走行センサーデータ（4ステップ）。どちらも既存オペレーションから収集。</a:t>
+              <a:t>2事業のデータフロー。左：廃棄物量データ（3ステップ）、右：走行センサーデータ（4ステップ）。どちらも既存オペレーションから収集。生映像は車載端末内で即時破棄（非可逆処理）。</a:t>
             </a:r>
             <a:endParaRPr lang="en-US" dirty="0"/>
           </a:p>
@@ -1217,7 +1217,7 @@
           <a:p>
             <a:r>
               <a:rPr lang="en-US" dirty="0"/>
-              <a:t>走行センサーデータの3分野：路（道路インフラ）・緑（都市景観）・交（交通モビリティ）。既存トラックの日常走行から自動収集。</a:t>
+              <a:t>3分野のデータ収集はPoC段階から段階的に拡張。路（道路インフラ）をPoC先行対象に絞り、緑（都市景観）・交（交通モビリティ）はPhase 2以降に展開。実証の実現可能性を重視したフェーズ設計。</a:t>
             </a:r>
             <a:endParaRPr lang="en-US" dirty="0"/>
           </a:p>
@@ -10528,7 +10528,7 @@
         <p:spPr>
           <a:xfrm>
             <a:off x="4992624" y="2267712"/>
-            <a:ext cx="0" cy="237744"/>
+            <a:ext cx="0" cy="182880"/>
           </a:xfrm>
           <a:prstGeom prst="line">
             <a:avLst/>
@@ -10628,7 +10628,7 @@
         </p:nvSpPr>
         <p:spPr>
           <a:xfrm>
-            <a:off x="4828032" y="2487168"/>
+            <a:off x="4828032" y="2450592"/>
             <a:ext cx="3767328" cy="0"/>
           </a:xfrm>
           <a:prstGeom prst="line">
@@ -10651,7 +10651,7 @@
         </p:nvSpPr>
         <p:spPr>
           <a:xfrm>
-            <a:off x="4828032" y="2542032"/>
+            <a:off x="4828032" y="2487168"/>
             <a:ext cx="438912" cy="438912"/>
           </a:xfrm>
           <a:prstGeom prst="ellipse">
@@ -10671,7 +10671,7 @@
         </p:nvSpPr>
         <p:spPr>
           <a:xfrm>
-            <a:off x="4828032" y="2542032"/>
+            <a:off x="4828032" y="2487168"/>
             <a:ext cx="438912" cy="438912"/>
           </a:xfrm>
           <a:prstGeom prst="rect">
@@ -10710,8 +10710,8 @@
         </p:nvSpPr>
         <p:spPr>
           <a:xfrm>
-            <a:off x="4992624" y="3017520"/>
-            <a:ext cx="0" cy="237744"/>
+            <a:off x="4992624" y="2962656"/>
+            <a:ext cx="0" cy="182880"/>
           </a:xfrm>
           <a:prstGeom prst="line">
             <a:avLst/>
@@ -10733,7 +10733,7 @@
         </p:nvSpPr>
         <p:spPr>
           <a:xfrm>
-            <a:off x="5394960" y="2578608"/>
+            <a:off x="5394960" y="2523744"/>
             <a:ext cx="3246120" cy="310896"/>
           </a:xfrm>
           <a:prstGeom prst="rect">
@@ -10758,7 +10758,7 @@
                 <a:ea typeface="Calibri" pitchFamily="34" charset="-122"/>
                 <a:cs typeface="Calibri" pitchFamily="34" charset="-120"/>
               </a:rPr>
-              <a:t>エッジAI処理</a:t>
+              <a:t>エッジAI処理（車載端末内）</a:t>
             </a:r>
             <a:endParaRPr lang="en-US" sz="1200" dirty="0"/>
           </a:p>
@@ -10772,7 +10772,7 @@
         </p:nvSpPr>
         <p:spPr>
           <a:xfrm>
-            <a:off x="5394960" y="2907792"/>
+            <a:off x="5394960" y="2852928"/>
             <a:ext cx="3246120" cy="237744"/>
           </a:xfrm>
           <a:prstGeom prst="rect">
@@ -10797,7 +10797,7 @@
                 <a:ea typeface="Calibri" pitchFamily="34" charset="-122"/>
                 <a:cs typeface="Calibri" pitchFamily="34" charset="-120"/>
               </a:rPr>
-              <a:t>個人情報を車内でマスキング</a:t>
+              <a:t>顔・ナンバーを非可逆処理・生映像は即時破棄</a:t>
             </a:r>
             <a:endParaRPr lang="en-US" sz="1050" dirty="0"/>
           </a:p>
@@ -10811,7 +10811,7 @@
         </p:nvSpPr>
         <p:spPr>
           <a:xfrm>
-            <a:off x="4828032" y="3236976"/>
+            <a:off x="4828032" y="3145536"/>
             <a:ext cx="3767328" cy="0"/>
           </a:xfrm>
           <a:prstGeom prst="line">
@@ -10834,7 +10834,7 @@
         </p:nvSpPr>
         <p:spPr>
           <a:xfrm>
-            <a:off x="4828032" y="3291840"/>
+            <a:off x="4828032" y="3182112"/>
             <a:ext cx="438912" cy="438912"/>
           </a:xfrm>
           <a:prstGeom prst="ellipse">
@@ -10854,7 +10854,7 @@
         </p:nvSpPr>
         <p:spPr>
           <a:xfrm>
-            <a:off x="4828032" y="3291840"/>
+            <a:off x="4828032" y="3182112"/>
             <a:ext cx="438912" cy="438912"/>
           </a:xfrm>
           <a:prstGeom prst="rect">
@@ -10893,8 +10893,8 @@
         </p:nvSpPr>
         <p:spPr>
           <a:xfrm>
-            <a:off x="4992624" y="3767328"/>
-            <a:ext cx="0" cy="237744"/>
+            <a:off x="4992624" y="3657600"/>
+            <a:ext cx="0" cy="182880"/>
           </a:xfrm>
           <a:prstGeom prst="line">
             <a:avLst/>
@@ -10916,7 +10916,7 @@
         </p:nvSpPr>
         <p:spPr>
           <a:xfrm>
-            <a:off x="5394960" y="3328416"/>
+            <a:off x="5394960" y="3218688"/>
             <a:ext cx="3246120" cy="310896"/>
           </a:xfrm>
           <a:prstGeom prst="rect">
@@ -10955,7 +10955,7 @@
         </p:nvSpPr>
         <p:spPr>
           <a:xfrm>
-            <a:off x="5394960" y="3657600"/>
+            <a:off x="5394960" y="3547872"/>
             <a:ext cx="3246120" cy="237744"/>
           </a:xfrm>
           <a:prstGeom prst="rect">
@@ -10980,7 +10980,7 @@
                 <a:ea typeface="Calibri" pitchFamily="34" charset="-122"/>
                 <a:cs typeface="Calibri" pitchFamily="34" charset="-120"/>
               </a:rPr>
-              <a:t>処理済みデータのみ転送</a:t>
+              <a:t>匿名化済みデータのみ転送</a:t>
             </a:r>
             <a:endParaRPr lang="en-US" sz="1050" dirty="0"/>
           </a:p>
@@ -10994,7 +10994,7 @@
         </p:nvSpPr>
         <p:spPr>
           <a:xfrm>
-            <a:off x="4828032" y="3986784"/>
+            <a:off x="4828032" y="3840480"/>
             <a:ext cx="3767328" cy="0"/>
           </a:xfrm>
           <a:prstGeom prst="line">
@@ -11017,7 +11017,7 @@
         </p:nvSpPr>
         <p:spPr>
           <a:xfrm>
-            <a:off x="4828032" y="4041648"/>
+            <a:off x="4828032" y="3877056"/>
             <a:ext cx="438912" cy="438912"/>
           </a:xfrm>
           <a:prstGeom prst="ellipse">
@@ -11037,7 +11037,7 @@
         </p:nvSpPr>
         <p:spPr>
           <a:xfrm>
-            <a:off x="4828032" y="4041648"/>
+            <a:off x="4828032" y="3877056"/>
             <a:ext cx="438912" cy="438912"/>
           </a:xfrm>
           <a:prstGeom prst="rect">
@@ -11076,7 +11076,7 @@
         </p:nvSpPr>
         <p:spPr>
           <a:xfrm>
-            <a:off x="5394960" y="4078224"/>
+            <a:off x="5394960" y="3913632"/>
             <a:ext cx="3246120" cy="310896"/>
           </a:xfrm>
           <a:prstGeom prst="rect">
@@ -11115,7 +11115,7 @@
         </p:nvSpPr>
         <p:spPr>
           <a:xfrm>
-            <a:off x="5394960" y="4407408"/>
+            <a:off x="5394960" y="4242816"/>
             <a:ext cx="3246120" cy="237744"/>
           </a:xfrm>
           <a:prstGeom prst="rect">
@@ -11143,6 +11143,65 @@
               <a:t>地図上で可視化・アラート通知</a:t>
             </a:r>
             <a:endParaRPr lang="en-US" sz="1050" dirty="0"/>
+          </a:p>
+        </p:txBody>
+      </p:sp>
+      <p:sp>
+        <p:nvSpPr>
+          <p:cNvPr id="56" name="Shape 54"/>
+          <p:cNvSpPr/>
+          <p:nvPr/>
+        </p:nvSpPr>
+        <p:spPr>
+          <a:xfrm>
+            <a:off x="4727448" y="4608576"/>
+            <a:ext cx="4032504" cy="256032"/>
+          </a:xfrm>
+          <a:prstGeom prst="rect">
+            <a:avLst/>
+          </a:prstGeom>
+          <a:solidFill>
+            <a:srgbClr val="D6EEF0"/>
+          </a:solidFill>
+          <a:ln/>
+        </p:spPr>
+      </p:sp>
+      <p:sp>
+        <p:nvSpPr>
+          <p:cNvPr id="57" name="Text 55"/>
+          <p:cNvSpPr/>
+          <p:nvPr/>
+        </p:nvSpPr>
+        <p:spPr>
+          <a:xfrm>
+            <a:off x="4809744" y="4617720"/>
+            <a:ext cx="3840480" cy="237744"/>
+          </a:xfrm>
+          <a:prstGeom prst="rect">
+            <a:avLst/>
+          </a:prstGeom>
+          <a:noFill/>
+          <a:ln/>
+        </p:spPr>
+        <p:txBody>
+          <a:bodyPr wrap="square" rtlCol="0" anchor="ctr"/>
+          <a:lstStyle/>
+          <a:p>
+            <a:pPr indent="0" marL="0">
+              <a:buNone/>
+            </a:pPr>
+            <a:r>
+              <a:rPr lang="en-US" sz="850" dirty="0">
+                <a:solidFill>
+                  <a:srgbClr val="0D7480"/>
+                </a:solidFill>
+                <a:latin typeface="Calibri" pitchFamily="34" charset="0"/>
+                <a:ea typeface="Calibri" pitchFamily="34" charset="-122"/>
+                <a:cs typeface="Calibri" pitchFamily="34" charset="-120"/>
+              </a:rPr>
+              <a:t>生映像は車載端末内で即時破棄（非可逆処理）。クラウドへは匿名化済みデータのみ転送します。</a:t>
+            </a:r>
+            <a:endParaRPr lang="en-US" sz="850" dirty="0"/>
           </a:p>
         </p:txBody>
       </p:sp>
@@ -11303,7 +11362,7 @@
                 <a:ea typeface="Calibri" pitchFamily="34" charset="-122"/>
                 <a:cs typeface="Calibri" pitchFamily="34" charset="-120"/>
               </a:rPr>
-              <a:t>トラックが走るだけで3分野のデータが集まる</a:t>
+              <a:t>まず「路面」に絞り、都市景観・交通は段階的に拡張</a:t>
             </a:r>
             <a:endParaRPr lang="en-US" sz="1600" dirty="0"/>
           </a:p>
@@ -11885,7 +11944,7 @@
         <p:spPr>
           <a:xfrm>
             <a:off x="4480560" y="932688"/>
-            <a:ext cx="4315968" cy="384048"/>
+            <a:ext cx="2011680" cy="384048"/>
           </a:xfrm>
           <a:prstGeom prst="rect">
             <a:avLst/>
@@ -11917,14 +11976,73 @@
       </p:sp>
       <p:sp>
         <p:nvSpPr>
-          <p:cNvPr id="29" name="Text 27"/>
+          <p:cNvPr id="29" name="Shape 27"/>
+          <p:cNvSpPr/>
+          <p:nvPr/>
+        </p:nvSpPr>
+        <p:spPr>
+          <a:xfrm>
+            <a:off x="6601968" y="950976"/>
+            <a:ext cx="1371600" cy="274320"/>
+          </a:xfrm>
+          <a:prstGeom prst="rect">
+            <a:avLst/>
+          </a:prstGeom>
+          <a:solidFill>
+            <a:srgbClr val="DD7E6B"/>
+          </a:solidFill>
+          <a:ln/>
+        </p:spPr>
+      </p:sp>
+      <p:sp>
+        <p:nvSpPr>
+          <p:cNvPr id="30" name="Text 28"/>
+          <p:cNvSpPr/>
+          <p:nvPr/>
+        </p:nvSpPr>
+        <p:spPr>
+          <a:xfrm>
+            <a:off x="6601968" y="950976"/>
+            <a:ext cx="1371600" cy="274320"/>
+          </a:xfrm>
+          <a:prstGeom prst="rect">
+            <a:avLst/>
+          </a:prstGeom>
+          <a:noFill/>
+          <a:ln/>
+        </p:spPr>
+        <p:txBody>
+          <a:bodyPr wrap="square" rtlCol="0" anchor="ctr"/>
+          <a:lstStyle/>
+          <a:p>
+            <a:pPr algn="ctr" indent="0" marL="0">
+              <a:buNone/>
+            </a:pPr>
+            <a:r>
+              <a:rPr lang="en-US" sz="900" b="1" spc="50" kern="0" dirty="0">
+                <a:solidFill>
+                  <a:srgbClr val="FFFFFF"/>
+                </a:solidFill>
+                <a:latin typeface="Calibri" pitchFamily="34" charset="0"/>
+                <a:ea typeface="Calibri" pitchFamily="34" charset="-122"/>
+                <a:cs typeface="Calibri" pitchFamily="34" charset="-120"/>
+              </a:rPr>
+              <a:t>PoC先行対象</a:t>
+            </a:r>
+            <a:endParaRPr lang="en-US" sz="900" dirty="0"/>
+          </a:p>
+        </p:txBody>
+      </p:sp>
+      <p:sp>
+        <p:nvSpPr>
+          <p:cNvPr id="31" name="Text 29"/>
           <p:cNvSpPr/>
           <p:nvPr/>
         </p:nvSpPr>
         <p:spPr>
           <a:xfrm>
             <a:off x="4480560" y="1371600"/>
-            <a:ext cx="4315968" cy="548640"/>
+            <a:ext cx="4315968" cy="658368"/>
           </a:xfrm>
           <a:prstGeom prst="rect">
             <a:avLst/>
@@ -11937,10 +12055,13 @@
           <a:lstStyle/>
           <a:p>
             <a:pPr indent="0" marL="0">
-              <a:buNone/>
-            </a:pPr>
-            <a:r>
-              <a:rPr lang="en-US" sz="1250" dirty="0">
+              <a:lnSpc>
+                <a:spcPct val="130000"/>
+              </a:lnSpc>
+              <a:buNone/>
+            </a:pPr>
+            <a:r>
+              <a:rPr lang="en-US" sz="1150" dirty="0">
                 <a:solidFill>
                   <a:srgbClr val="595959"/>
                 </a:solidFill>
@@ -11948,15 +12069,15 @@
                 <a:ea typeface="Calibri" pitchFamily="34" charset="-122"/>
                 <a:cs typeface="Calibri" pitchFamily="34" charset="-120"/>
               </a:rPr>
-              <a:t>路面陥没・ひび割れ・落下物・補修優先度マップ</a:t>
-            </a:r>
-            <a:endParaRPr lang="en-US" sz="1250" dirty="0"/>
-          </a:p>
-        </p:txBody>
-      </p:sp>
-      <p:sp>
-        <p:nvSpPr>
-          <p:cNvPr id="30" name="Shape 28"/>
+              <a:t>路面陥没・ひび割れ・落下物・補修優先度マップ。まず路面データに集中してPoC効果を実証します。</a:t>
+            </a:r>
+            <a:endParaRPr lang="en-US" sz="1150" dirty="0"/>
+          </a:p>
+        </p:txBody>
+      </p:sp>
+      <p:sp>
+        <p:nvSpPr>
+          <p:cNvPr id="32" name="Shape 30"/>
           <p:cNvSpPr/>
           <p:nvPr/>
         </p:nvSpPr>
@@ -11979,7 +12100,7 @@
       </p:sp>
       <p:sp>
         <p:nvSpPr>
-          <p:cNvPr id="31" name="Shape 29"/>
+          <p:cNvPr id="33" name="Shape 31"/>
           <p:cNvSpPr/>
           <p:nvPr/>
         </p:nvSpPr>
@@ -11992,14 +12113,14 @@
             <a:avLst/>
           </a:prstGeom>
           <a:solidFill>
-            <a:srgbClr val="156818"/>
-          </a:solidFill>
-          <a:ln/>
-        </p:spPr>
-      </p:sp>
-      <p:sp>
-        <p:nvSpPr>
-          <p:cNvPr id="32" name="Text 30"/>
+            <a:srgbClr val="888888"/>
+          </a:solidFill>
+          <a:ln/>
+        </p:spPr>
+      </p:sp>
+      <p:sp>
+        <p:nvSpPr>
+          <p:cNvPr id="34" name="Text 32"/>
           <p:cNvSpPr/>
           <p:nvPr/>
         </p:nvSpPr>
@@ -12038,14 +12159,14 @@
       </p:sp>
       <p:sp>
         <p:nvSpPr>
-          <p:cNvPr id="33" name="Text 31"/>
+          <p:cNvPr id="35" name="Text 33"/>
           <p:cNvSpPr/>
           <p:nvPr/>
         </p:nvSpPr>
         <p:spPr>
           <a:xfrm>
             <a:off x="4480560" y="2286000"/>
-            <a:ext cx="4315968" cy="384048"/>
+            <a:ext cx="2011680" cy="384048"/>
           </a:xfrm>
           <a:prstGeom prst="rect">
             <a:avLst/>
@@ -12063,7 +12184,7 @@
             <a:r>
               <a:rPr lang="en-US" sz="1700" b="1" dirty="0">
                 <a:solidFill>
-                  <a:srgbClr val="156818"/>
+                  <a:srgbClr val="999999"/>
                 </a:solidFill>
                 <a:latin typeface="Calibri" pitchFamily="34" charset="0"/>
                 <a:ea typeface="Calibri" pitchFamily="34" charset="-122"/>
@@ -12077,14 +12198,73 @@
       </p:sp>
       <p:sp>
         <p:nvSpPr>
-          <p:cNvPr id="34" name="Text 32"/>
+          <p:cNvPr id="36" name="Shape 34"/>
+          <p:cNvSpPr/>
+          <p:nvPr/>
+        </p:nvSpPr>
+        <p:spPr>
+          <a:xfrm>
+            <a:off x="6601968" y="2304288"/>
+            <a:ext cx="1371600" cy="274320"/>
+          </a:xfrm>
+          <a:prstGeom prst="rect">
+            <a:avLst/>
+          </a:prstGeom>
+          <a:solidFill>
+            <a:srgbClr val="888888"/>
+          </a:solidFill>
+          <a:ln/>
+        </p:spPr>
+      </p:sp>
+      <p:sp>
+        <p:nvSpPr>
+          <p:cNvPr id="37" name="Text 35"/>
+          <p:cNvSpPr/>
+          <p:nvPr/>
+        </p:nvSpPr>
+        <p:spPr>
+          <a:xfrm>
+            <a:off x="6601968" y="2304288"/>
+            <a:ext cx="1371600" cy="274320"/>
+          </a:xfrm>
+          <a:prstGeom prst="rect">
+            <a:avLst/>
+          </a:prstGeom>
+          <a:noFill/>
+          <a:ln/>
+        </p:spPr>
+        <p:txBody>
+          <a:bodyPr wrap="square" rtlCol="0" anchor="ctr"/>
+          <a:lstStyle/>
+          <a:p>
+            <a:pPr algn="ctr" indent="0" marL="0">
+              <a:buNone/>
+            </a:pPr>
+            <a:r>
+              <a:rPr lang="en-US" sz="900" b="1" spc="50" kern="0" dirty="0">
+                <a:solidFill>
+                  <a:srgbClr val="FFFFFF"/>
+                </a:solidFill>
+                <a:latin typeface="Calibri" pitchFamily="34" charset="0"/>
+                <a:ea typeface="Calibri" pitchFamily="34" charset="-122"/>
+                <a:cs typeface="Calibri" pitchFamily="34" charset="-120"/>
+              </a:rPr>
+              <a:t>Phase 2以降</a:t>
+            </a:r>
+            <a:endParaRPr lang="en-US" sz="900" dirty="0"/>
+          </a:p>
+        </p:txBody>
+      </p:sp>
+      <p:sp>
+        <p:nvSpPr>
+          <p:cNvPr id="38" name="Text 36"/>
           <p:cNvSpPr/>
           <p:nvPr/>
         </p:nvSpPr>
         <p:spPr>
           <a:xfrm>
             <a:off x="4480560" y="2724912"/>
-            <a:ext cx="4315968" cy="548640"/>
+            <a:ext cx="4315968" cy="658368"/>
           </a:xfrm>
           <a:prstGeom prst="rect">
             <a:avLst/>
@@ -12097,26 +12277,29 @@
           <a:lstStyle/>
           <a:p>
             <a:pPr indent="0" marL="0">
-              <a:buNone/>
-            </a:pPr>
-            <a:r>
-              <a:rPr lang="en-US" sz="1250" dirty="0">
-                <a:solidFill>
-                  <a:srgbClr val="595959"/>
-                </a:solidFill>
-                <a:latin typeface="Calibri" pitchFamily="34" charset="0"/>
-                <a:ea typeface="Calibri" pitchFamily="34" charset="-122"/>
-                <a:cs typeface="Calibri" pitchFamily="34" charset="-120"/>
-              </a:rPr>
-              <a:t>街路樹の状態・看板視認性・メンテナンス要否</a:t>
-            </a:r>
-            <a:endParaRPr lang="en-US" sz="1250" dirty="0"/>
-          </a:p>
-        </p:txBody>
-      </p:sp>
-      <p:sp>
-        <p:nvSpPr>
-          <p:cNvPr id="35" name="Shape 33"/>
+              <a:lnSpc>
+                <a:spcPct val="130000"/>
+              </a:lnSpc>
+              <a:buNone/>
+            </a:pPr>
+            <a:r>
+              <a:rPr lang="en-US" sz="1150" dirty="0">
+                <a:solidFill>
+                  <a:srgbClr val="999999"/>
+                </a:solidFill>
+                <a:latin typeface="Calibri" pitchFamily="34" charset="0"/>
+                <a:ea typeface="Calibri" pitchFamily="34" charset="-122"/>
+                <a:cs typeface="Calibri" pitchFamily="34" charset="-120"/>
+              </a:rPr>
+              <a:t>街路樹の状態・看板視認性・メンテナンス要否（路面PoCの成果を踏まえて拡張）</a:t>
+            </a:r>
+            <a:endParaRPr lang="en-US" sz="1150" dirty="0"/>
+          </a:p>
+        </p:txBody>
+      </p:sp>
+      <p:sp>
+        <p:nvSpPr>
+          <p:cNvPr id="39" name="Shape 37"/>
           <p:cNvSpPr/>
           <p:nvPr/>
         </p:nvSpPr>
@@ -12139,7 +12322,7 @@
       </p:sp>
       <p:sp>
         <p:nvSpPr>
-          <p:cNvPr id="36" name="Shape 34"/>
+          <p:cNvPr id="40" name="Shape 38"/>
           <p:cNvSpPr/>
           <p:nvPr/>
         </p:nvSpPr>
@@ -12152,14 +12335,14 @@
             <a:avLst/>
           </a:prstGeom>
           <a:solidFill>
-            <a:srgbClr val="0D7480"/>
-          </a:solidFill>
-          <a:ln/>
-        </p:spPr>
-      </p:sp>
-      <p:sp>
-        <p:nvSpPr>
-          <p:cNvPr id="37" name="Text 35"/>
+            <a:srgbClr val="888888"/>
+          </a:solidFill>
+          <a:ln/>
+        </p:spPr>
+      </p:sp>
+      <p:sp>
+        <p:nvSpPr>
+          <p:cNvPr id="41" name="Text 39"/>
           <p:cNvSpPr/>
           <p:nvPr/>
         </p:nvSpPr>
@@ -12198,14 +12381,14 @@
       </p:sp>
       <p:sp>
         <p:nvSpPr>
-          <p:cNvPr id="38" name="Text 36"/>
+          <p:cNvPr id="42" name="Text 40"/>
           <p:cNvSpPr/>
           <p:nvPr/>
         </p:nvSpPr>
         <p:spPr>
           <a:xfrm>
             <a:off x="4480560" y="3639312"/>
-            <a:ext cx="4315968" cy="384048"/>
+            <a:ext cx="2011680" cy="384048"/>
           </a:xfrm>
           <a:prstGeom prst="rect">
             <a:avLst/>
@@ -12223,7 +12406,7 @@
             <a:r>
               <a:rPr lang="en-US" sz="1700" b="1" dirty="0">
                 <a:solidFill>
-                  <a:srgbClr val="0D7480"/>
+                  <a:srgbClr val="999999"/>
                 </a:solidFill>
                 <a:latin typeface="Calibri" pitchFamily="34" charset="0"/>
                 <a:ea typeface="Calibri" pitchFamily="34" charset="-122"/>
@@ -12237,14 +12420,73 @@
       </p:sp>
       <p:sp>
         <p:nvSpPr>
-          <p:cNvPr id="39" name="Text 37"/>
+          <p:cNvPr id="43" name="Shape 41"/>
+          <p:cNvSpPr/>
+          <p:nvPr/>
+        </p:nvSpPr>
+        <p:spPr>
+          <a:xfrm>
+            <a:off x="6601968" y="3657600"/>
+            <a:ext cx="1371600" cy="274320"/>
+          </a:xfrm>
+          <a:prstGeom prst="rect">
+            <a:avLst/>
+          </a:prstGeom>
+          <a:solidFill>
+            <a:srgbClr val="888888"/>
+          </a:solidFill>
+          <a:ln/>
+        </p:spPr>
+      </p:sp>
+      <p:sp>
+        <p:nvSpPr>
+          <p:cNvPr id="44" name="Text 42"/>
+          <p:cNvSpPr/>
+          <p:nvPr/>
+        </p:nvSpPr>
+        <p:spPr>
+          <a:xfrm>
+            <a:off x="6601968" y="3657600"/>
+            <a:ext cx="1371600" cy="274320"/>
+          </a:xfrm>
+          <a:prstGeom prst="rect">
+            <a:avLst/>
+          </a:prstGeom>
+          <a:noFill/>
+          <a:ln/>
+        </p:spPr>
+        <p:txBody>
+          <a:bodyPr wrap="square" rtlCol="0" anchor="ctr"/>
+          <a:lstStyle/>
+          <a:p>
+            <a:pPr algn="ctr" indent="0" marL="0">
+              <a:buNone/>
+            </a:pPr>
+            <a:r>
+              <a:rPr lang="en-US" sz="900" b="1" spc="50" kern="0" dirty="0">
+                <a:solidFill>
+                  <a:srgbClr val="FFFFFF"/>
+                </a:solidFill>
+                <a:latin typeface="Calibri" pitchFamily="34" charset="0"/>
+                <a:ea typeface="Calibri" pitchFamily="34" charset="-122"/>
+                <a:cs typeface="Calibri" pitchFamily="34" charset="-120"/>
+              </a:rPr>
+              <a:t>Phase 2以降</a:t>
+            </a:r>
+            <a:endParaRPr lang="en-US" sz="900" dirty="0"/>
+          </a:p>
+        </p:txBody>
+      </p:sp>
+      <p:sp>
+        <p:nvSpPr>
+          <p:cNvPr id="45" name="Text 43"/>
           <p:cNvSpPr/>
           <p:nvPr/>
         </p:nvSpPr>
         <p:spPr>
           <a:xfrm>
             <a:off x="4480560" y="4078224"/>
-            <a:ext cx="4315968" cy="548640"/>
+            <a:ext cx="4315968" cy="658368"/>
           </a:xfrm>
           <a:prstGeom prst="rect">
             <a:avLst/>
@@ -12257,20 +12499,23 @@
           <a:lstStyle/>
           <a:p>
             <a:pPr indent="0" marL="0">
-              <a:buNone/>
-            </a:pPr>
-            <a:r>
-              <a:rPr lang="en-US" sz="1250" dirty="0">
-                <a:solidFill>
-                  <a:srgbClr val="595959"/>
-                </a:solidFill>
-                <a:latin typeface="Calibri" pitchFamily="34" charset="0"/>
-                <a:ea typeface="Calibri" pitchFamily="34" charset="-122"/>
-                <a:cs typeface="Calibri" pitchFamily="34" charset="-120"/>
-              </a:rPr>
-              <a:t>渋滞区間・路上駐車・交通施策の効果測定</a:t>
-            </a:r>
-            <a:endParaRPr lang="en-US" sz="1250" dirty="0"/>
+              <a:lnSpc>
+                <a:spcPct val="130000"/>
+              </a:lnSpc>
+              <a:buNone/>
+            </a:pPr>
+            <a:r>
+              <a:rPr lang="en-US" sz="1150" dirty="0">
+                <a:solidFill>
+                  <a:srgbClr val="999999"/>
+                </a:solidFill>
+                <a:latin typeface="Calibri" pitchFamily="34" charset="0"/>
+                <a:ea typeface="Calibri" pitchFamily="34" charset="-122"/>
+                <a:cs typeface="Calibri" pitchFamily="34" charset="-120"/>
+              </a:rPr>
+              <a:t>渋滞区間・路上駐車・交通施策の効果測定（路面PoCの成果を踏まえて拡張）</a:t>
+            </a:r>
+            <a:endParaRPr lang="en-US" sz="1150" dirty="0"/>
           </a:p>
         </p:txBody>
       </p:sp>

--- a/川崎市_統合提案資料_v2.pptx
+++ b/川崎市_統合提案資料_v2.pptx
@@ -1041,7 +1041,7 @@
           <a:p>
             <a:r>
               <a:rPr lang="en-US" dirty="0"/>
-              <a:t>3つの課題：①市道約2,400kmのカバー率限界（川崎市固有数値）、②道路インフラ長寿命化計画が掲げる予防保全への転換、③環境施策・廃棄物管理のデータ不足。サキュレの2事業で解決を提案。</a:t>
+              <a:t>3つの課題：①市道約2,400kmのカバー率限界（川崎市固有数値）、②道路インフラ長寿命化計画が掲げる予防保全への転換、③環境施策・廃棄物管理のデータ不足。サキュレの2事業で解決を提案。川崎市重点施策との連動を明示。</a:t>
             </a:r>
             <a:endParaRPr lang="en-US" dirty="0"/>
           </a:p>
@@ -9499,6 +9499,45 @@
               <a:t>廃棄物排出量の変動や施設別の廃棄物動向を定量的に把握する手段が乏しく、環境KPIの達成状況の検証や廃棄物管理施策の根拠となるデータの整備が求められています。</a:t>
             </a:r>
             <a:endParaRPr lang="en-US" sz="1150" dirty="0"/>
+          </a:p>
+        </p:txBody>
+      </p:sp>
+      <p:sp>
+        <p:nvSpPr>
+          <p:cNvPr id="25" name="Text 23"/>
+          <p:cNvSpPr/>
+          <p:nvPr/>
+        </p:nvSpPr>
+        <p:spPr>
+          <a:xfrm>
+            <a:off x="493776" y="4919472"/>
+            <a:ext cx="8284464" cy="201168"/>
+          </a:xfrm>
+          <a:prstGeom prst="rect">
+            <a:avLst/>
+          </a:prstGeom>
+          <a:noFill/>
+          <a:ln/>
+        </p:spPr>
+        <p:txBody>
+          <a:bodyPr wrap="square" rtlCol="0" anchor="ctr"/>
+          <a:lstStyle/>
+          <a:p>
+            <a:pPr indent="0" marL="0">
+              <a:buNone/>
+            </a:pPr>
+            <a:r>
+              <a:rPr lang="en-US" sz="900" dirty="0">
+                <a:solidFill>
+                  <a:srgbClr val="999999"/>
+                </a:solidFill>
+                <a:latin typeface="Calibri" pitchFamily="34" charset="0"/>
+                <a:ea typeface="Calibri" pitchFamily="34" charset="-122"/>
+                <a:cs typeface="Calibri" pitchFamily="34" charset="-120"/>
+              </a:rPr>
+              <a:t>▶ 上記はすべて川崎市重点施策「未来の市民の足を守る交通環境の形成」「データを活用した健康づくり」と直接連動しています。</a:t>
+            </a:r>
+            <a:endParaRPr lang="en-US" sz="900" dirty="0"/>
           </a:p>
         </p:txBody>
       </p:sp>
